--- a/summary/layout/요약본 레이아웃.pptx
+++ b/summary/layout/요약본 레이아웃.pptx
@@ -15749,7 +15749,7 @@
                 <a:latin typeface="피플폰트 Bold" panose="020B0600000101010101" pitchFamily="50" charset="-127"/>
                 <a:ea typeface="피플폰트 Bold" panose="020B0600000101010101" pitchFamily="50" charset="-127"/>
               </a:rPr>
-              <a:t>기조자산 담보대출</a:t>
+              <a:t>기초자산 담보대출</a:t>
             </a:r>
           </a:p>
         </p:txBody>
